--- a/exercises/1_unit-tests-and-coverage/instructions.pptx
+++ b/exercises/1_unit-tests-and-coverage/instructions.pptx
@@ -213,7 +213,7 @@
           <a:p>
             <a:fld id="{F78929D2-0E8B-4573-AA4B-C87D4F90B452}" type="datetimeFigureOut">
               <a:rPr lang="en-US" smtClean="0"/>
-              <a:t>6/22/2026</a:t>
+              <a:t>6/25/2026</a:t>
             </a:fld>
             <a:endParaRPr lang="en-US"/>
           </a:p>
@@ -7879,7 +7879,7 @@
           <a:p>
             <a:fld id="{8CF8D308-A2A6-458E-94F6-BC214F8ABC37}" type="datetime1">
               <a:rPr lang="en-US" smtClean="0"/>
-              <a:t>6/22/2026</a:t>
+              <a:t>6/25/2026</a:t>
             </a:fld>
             <a:endParaRPr lang="en-US"/>
           </a:p>
@@ -8077,7 +8077,7 @@
           <a:p>
             <a:fld id="{B75DB6CE-6FE7-4B2B-9FC6-2BCAE31CBB40}" type="datetime1">
               <a:rPr lang="en-US" smtClean="0"/>
-              <a:t>6/22/2026</a:t>
+              <a:t>6/25/2026</a:t>
             </a:fld>
             <a:endParaRPr lang="en-US"/>
           </a:p>
@@ -8285,7 +8285,7 @@
           <a:p>
             <a:fld id="{5ABCA857-2376-48D2-96A8-556A5B78D1EC}" type="datetime1">
               <a:rPr lang="en-US" smtClean="0"/>
-              <a:t>6/22/2026</a:t>
+              <a:t>6/25/2026</a:t>
             </a:fld>
             <a:endParaRPr lang="en-US"/>
           </a:p>
@@ -9680,7 +9680,7 @@
           <a:p>
             <a:fld id="{4D8885F6-4E0D-4F96-9D4A-701A51C03A8E}" type="datetime1">
               <a:rPr lang="en-US" smtClean="0"/>
-              <a:t>6/22/2026</a:t>
+              <a:t>6/25/2026</a:t>
             </a:fld>
             <a:endParaRPr lang="en-US"/>
           </a:p>
@@ -9955,7 +9955,7 @@
           <a:p>
             <a:fld id="{D0FE6074-FB5B-4111-AD69-45F699D11CEE}" type="datetime1">
               <a:rPr lang="en-US" smtClean="0"/>
-              <a:t>6/22/2026</a:t>
+              <a:t>6/25/2026</a:t>
             </a:fld>
             <a:endParaRPr lang="en-US"/>
           </a:p>
@@ -10220,7 +10220,7 @@
           <a:p>
             <a:fld id="{4D043287-A541-4FBC-9DFE-4C26D02CBEED}" type="datetime1">
               <a:rPr lang="en-US" smtClean="0"/>
-              <a:t>6/22/2026</a:t>
+              <a:t>6/25/2026</a:t>
             </a:fld>
             <a:endParaRPr lang="en-US"/>
           </a:p>
@@ -10632,7 +10632,7 @@
           <a:p>
             <a:fld id="{16F4DCE4-AB02-448D-8752-78E172822B45}" type="datetime1">
               <a:rPr lang="en-US" smtClean="0"/>
-              <a:t>6/22/2026</a:t>
+              <a:t>6/25/2026</a:t>
             </a:fld>
             <a:endParaRPr lang="en-US"/>
           </a:p>
@@ -10773,7 +10773,7 @@
           <a:p>
             <a:fld id="{306880FA-E6AF-4379-8F5E-BF92A0077603}" type="datetime1">
               <a:rPr lang="en-US" smtClean="0"/>
-              <a:t>6/22/2026</a:t>
+              <a:t>6/25/2026</a:t>
             </a:fld>
             <a:endParaRPr lang="en-US"/>
           </a:p>
@@ -10886,7 +10886,7 @@
           <a:p>
             <a:fld id="{118573D9-244C-41BD-9010-1679B124B651}" type="datetime1">
               <a:rPr lang="en-US" smtClean="0"/>
-              <a:t>6/22/2026</a:t>
+              <a:t>6/25/2026</a:t>
             </a:fld>
             <a:endParaRPr lang="en-US"/>
           </a:p>
@@ -11197,7 +11197,7 @@
           <a:p>
             <a:fld id="{FAE75AE8-4771-44FE-AD20-D090FAF8EACD}" type="datetime1">
               <a:rPr lang="en-US" smtClean="0"/>
-              <a:t>6/22/2026</a:t>
+              <a:t>6/25/2026</a:t>
             </a:fld>
             <a:endParaRPr lang="en-US"/>
           </a:p>
@@ -11485,7 +11485,7 @@
           <a:p>
             <a:fld id="{D972CF6E-9787-4A8B-BC44-1D044A98129C}" type="datetime1">
               <a:rPr lang="en-US" smtClean="0"/>
-              <a:t>6/22/2026</a:t>
+              <a:t>6/25/2026</a:t>
             </a:fld>
             <a:endParaRPr lang="en-US"/>
           </a:p>
@@ -11726,7 +11726,7 @@
           <a:p>
             <a:fld id="{BBCA354C-DC0A-4C3E-BF4A-9931F7807B94}" type="datetime1">
               <a:rPr lang="en-US" smtClean="0"/>
-              <a:t>6/22/2026</a:t>
+              <a:t>6/25/2026</a:t>
             </a:fld>
             <a:endParaRPr lang="en-US"/>
           </a:p>
@@ -17331,7 +17331,7 @@
         <p:spPr>
           <a:xfrm>
             <a:off x="351431" y="1243324"/>
-            <a:ext cx="10873617" cy="3584484"/>
+            <a:ext cx="11346583" cy="4926248"/>
           </a:xfrm>
           <a:prstGeom prst="rect">
             <a:avLst/>
@@ -17506,9 +17506,6 @@
             </a:lvl9pPr>
           </a:lstStyle>
           <a:p>
-            <a:pPr marL="342900" indent="-342900">
-              <a:buChar char="•"/>
-            </a:pPr>
             <a:r>
               <a:rPr lang="en-US" sz="2000" b="0" dirty="0">
                 <a:solidFill>
@@ -17516,7 +17513,7 @@
                 </a:solidFill>
                 <a:latin typeface="AmericanSans"/>
               </a:rPr>
-              <a:t>Check out how the unit tests were created for the function `add` as a starting point.</a:t>
+              <a:t>Check out how the unit tests were created for the function `add()` as a starting point (“main” branch).</a:t>
             </a:r>
           </a:p>
           <a:p>
@@ -17581,9 +17578,6 @@
             </a:endParaRPr>
           </a:p>
           <a:p>
-            <a:pPr marL="342900" indent="-342900">
-              <a:buChar char="•"/>
-            </a:pPr>
             <a:r>
               <a:rPr lang="en-US" sz="2000" b="0" dirty="0">
                 <a:solidFill>
@@ -17591,25 +17585,7 @@
                 </a:solidFill>
                 <a:latin typeface="AmericanSans"/>
               </a:rPr>
-              <a:t>Implement the unit tests of the implemented </a:t>
-            </a:r>
-            <a:r>
-              <a:rPr lang="en-US" sz="2000" b="0" dirty="0" err="1">
-                <a:solidFill>
-                  <a:schemeClr val="tx1"/>
-                </a:solidFill>
-                <a:latin typeface="AmericanSans"/>
-              </a:rPr>
-              <a:t>function`divide</a:t>
-            </a:r>
-            <a:r>
-              <a:rPr lang="en-US" sz="2000" b="0" dirty="0">
-                <a:solidFill>
-                  <a:schemeClr val="tx1"/>
-                </a:solidFill>
-                <a:latin typeface="AmericanSans"/>
-              </a:rPr>
-              <a:t>` in the calculator.py script until you reach </a:t>
+              <a:t>Implement the unit tests of the implemented function `divide()` in the calculator.py script until you reach </a:t>
             </a:r>
             <a:r>
               <a:rPr lang="en-US" sz="2000" dirty="0">
@@ -17657,6 +17633,48 @@
             </a:endParaRPr>
           </a:p>
           <a:p>
+            <a:r>
+              <a:rPr lang="en-US" sz="2000" b="0" dirty="0">
+                <a:solidFill>
+                  <a:schemeClr val="tx1"/>
+                </a:solidFill>
+                <a:latin typeface="AmericanSans"/>
+                <a:sym typeface="Wingdings" panose="05000000000000000000" pitchFamily="2" charset="2"/>
+              </a:rPr>
+              <a:t> </a:t>
+            </a:r>
+            <a:r>
+              <a:rPr lang="en-US" sz="2000" b="0" dirty="0">
+                <a:solidFill>
+                  <a:schemeClr val="tx1"/>
+                </a:solidFill>
+                <a:latin typeface="AmericanSans"/>
+              </a:rPr>
+              <a:t>Place your unit tests on this test file:</a:t>
+            </a:r>
+          </a:p>
+          <a:p>
+            <a:r>
+              <a:rPr lang="en-US" sz="2000" b="0" dirty="0">
+                <a:solidFill>
+                  <a:schemeClr val="tx1"/>
+                </a:solidFill>
+                <a:latin typeface="AmericanSans"/>
+                <a:hlinkClick r:id="rId4"/>
+              </a:rPr>
+              <a:t>https://github.com/sefop/training-testing-python/blob/main/tests/test_calculator_divide.py</a:t>
+            </a:r>
+            <a:r>
+              <a:rPr lang="en-US" sz="2000" b="0" dirty="0">
+                <a:solidFill>
+                  <a:schemeClr val="tx1"/>
+                </a:solidFill>
+                <a:latin typeface="AmericanSans"/>
+              </a:rPr>
+              <a:t>  </a:t>
+            </a:r>
+          </a:p>
+          <a:p>
             <a:endParaRPr lang="en-US" sz="2000" b="0" dirty="0">
               <a:solidFill>
                 <a:schemeClr val="tx1"/>
@@ -17665,10 +17683,6 @@
             </a:endParaRPr>
           </a:p>
           <a:p>
-            <a:pPr marL="342900" indent="-342900">
-              <a:buFont typeface="Arial" panose="020B0604020202020204" pitchFamily="34" charset="0"/>
-              <a:buChar char="•"/>
-            </a:pPr>
             <a:r>
               <a:rPr lang="en-US" sz="2000" b="0" dirty="0">
                 <a:solidFill>
@@ -17676,28 +17690,7 @@
                 </a:solidFill>
                 <a:latin typeface="AmericanSans"/>
               </a:rPr>
-              <a:t> Place your unit tests on this test file:</a:t>
-            </a:r>
-          </a:p>
-          <a:p>
-            <a:r>
-              <a:rPr lang="en-US" sz="2000" b="0" dirty="0">
-                <a:solidFill>
-                  <a:schemeClr val="tx1"/>
-                </a:solidFill>
-                <a:latin typeface="AmericanSans"/>
-                <a:hlinkClick r:id="rId4"/>
-              </a:rPr>
-              <a:t>https://github.com/sefop/training-testing-python/blob/main/tests/test_calculator_divide.py</a:t>
-            </a:r>
-            <a:r>
-              <a:rPr lang="en-US" sz="2000" b="0" dirty="0">
-                <a:solidFill>
-                  <a:schemeClr val="tx1"/>
-                </a:solidFill>
-                <a:latin typeface="AmericanSans"/>
-              </a:rPr>
-              <a:t>  </a:t>
+              <a:t>The solutions of this exercise are in the “solutions” branch.</a:t>
             </a:r>
           </a:p>
         </p:txBody>

--- a/exercises/1_unit-tests-and-coverage/instructions.pptx
+++ b/exercises/1_unit-tests-and-coverage/instructions.pptx
@@ -213,7 +213,7 @@
           <a:p>
             <a:fld id="{F78929D2-0E8B-4573-AA4B-C87D4F90B452}" type="datetimeFigureOut">
               <a:rPr lang="en-US" smtClean="0"/>
-              <a:t>6/25/2026</a:t>
+              <a:t>6/27/2026</a:t>
             </a:fld>
             <a:endParaRPr lang="en-US"/>
           </a:p>
@@ -7879,7 +7879,7 @@
           <a:p>
             <a:fld id="{8CF8D308-A2A6-458E-94F6-BC214F8ABC37}" type="datetime1">
               <a:rPr lang="en-US" smtClean="0"/>
-              <a:t>6/25/2026</a:t>
+              <a:t>6/27/2026</a:t>
             </a:fld>
             <a:endParaRPr lang="en-US"/>
           </a:p>
@@ -8077,7 +8077,7 @@
           <a:p>
             <a:fld id="{B75DB6CE-6FE7-4B2B-9FC6-2BCAE31CBB40}" type="datetime1">
               <a:rPr lang="en-US" smtClean="0"/>
-              <a:t>6/25/2026</a:t>
+              <a:t>6/27/2026</a:t>
             </a:fld>
             <a:endParaRPr lang="en-US"/>
           </a:p>
@@ -8285,7 +8285,7 @@
           <a:p>
             <a:fld id="{5ABCA857-2376-48D2-96A8-556A5B78D1EC}" type="datetime1">
               <a:rPr lang="en-US" smtClean="0"/>
-              <a:t>6/25/2026</a:t>
+              <a:t>6/27/2026</a:t>
             </a:fld>
             <a:endParaRPr lang="en-US"/>
           </a:p>
@@ -9680,7 +9680,7 @@
           <a:p>
             <a:fld id="{4D8885F6-4E0D-4F96-9D4A-701A51C03A8E}" type="datetime1">
               <a:rPr lang="en-US" smtClean="0"/>
-              <a:t>6/25/2026</a:t>
+              <a:t>6/27/2026</a:t>
             </a:fld>
             <a:endParaRPr lang="en-US"/>
           </a:p>
@@ -9955,7 +9955,7 @@
           <a:p>
             <a:fld id="{D0FE6074-FB5B-4111-AD69-45F699D11CEE}" type="datetime1">
               <a:rPr lang="en-US" smtClean="0"/>
-              <a:t>6/25/2026</a:t>
+              <a:t>6/27/2026</a:t>
             </a:fld>
             <a:endParaRPr lang="en-US"/>
           </a:p>
@@ -10220,7 +10220,7 @@
           <a:p>
             <a:fld id="{4D043287-A541-4FBC-9DFE-4C26D02CBEED}" type="datetime1">
               <a:rPr lang="en-US" smtClean="0"/>
-              <a:t>6/25/2026</a:t>
+              <a:t>6/27/2026</a:t>
             </a:fld>
             <a:endParaRPr lang="en-US"/>
           </a:p>
@@ -10632,7 +10632,7 @@
           <a:p>
             <a:fld id="{16F4DCE4-AB02-448D-8752-78E172822B45}" type="datetime1">
               <a:rPr lang="en-US" smtClean="0"/>
-              <a:t>6/25/2026</a:t>
+              <a:t>6/27/2026</a:t>
             </a:fld>
             <a:endParaRPr lang="en-US"/>
           </a:p>
@@ -10773,7 +10773,7 @@
           <a:p>
             <a:fld id="{306880FA-E6AF-4379-8F5E-BF92A0077603}" type="datetime1">
               <a:rPr lang="en-US" smtClean="0"/>
-              <a:t>6/25/2026</a:t>
+              <a:t>6/27/2026</a:t>
             </a:fld>
             <a:endParaRPr lang="en-US"/>
           </a:p>
@@ -10886,7 +10886,7 @@
           <a:p>
             <a:fld id="{118573D9-244C-41BD-9010-1679B124B651}" type="datetime1">
               <a:rPr lang="en-US" smtClean="0"/>
-              <a:t>6/25/2026</a:t>
+              <a:t>6/27/2026</a:t>
             </a:fld>
             <a:endParaRPr lang="en-US"/>
           </a:p>
@@ -11197,7 +11197,7 @@
           <a:p>
             <a:fld id="{FAE75AE8-4771-44FE-AD20-D090FAF8EACD}" type="datetime1">
               <a:rPr lang="en-US" smtClean="0"/>
-              <a:t>6/25/2026</a:t>
+              <a:t>6/27/2026</a:t>
             </a:fld>
             <a:endParaRPr lang="en-US"/>
           </a:p>
@@ -11485,7 +11485,7 @@
           <a:p>
             <a:fld id="{D972CF6E-9787-4A8B-BC44-1D044A98129C}" type="datetime1">
               <a:rPr lang="en-US" smtClean="0"/>
-              <a:t>6/25/2026</a:t>
+              <a:t>6/27/2026</a:t>
             </a:fld>
             <a:endParaRPr lang="en-US"/>
           </a:p>
@@ -11726,7 +11726,7 @@
           <a:p>
             <a:fld id="{BBCA354C-DC0A-4C3E-BF4A-9931F7807B94}" type="datetime1">
               <a:rPr lang="en-US" smtClean="0"/>
-              <a:t>6/25/2026</a:t>
+              <a:t>6/27/2026</a:t>
             </a:fld>
             <a:endParaRPr lang="en-US"/>
           </a:p>
@@ -13365,7 +13365,15 @@
             <a:pPr algn="l"/>
             <a:r>
               <a:rPr lang="en-US" sz="3600" dirty="0"/>
-              <a:t>An outlet providing power as an analogy</a:t>
+              <a:t>An outlet providing power is an </a:t>
+            </a:r>
+            <a:r>
+              <a:rPr lang="en-US" sz="3600" b="1" dirty="0"/>
+              <a:t>abstraction</a:t>
+            </a:r>
+            <a:r>
+              <a:rPr lang="en-US" sz="3600" dirty="0"/>
+              <a:t> of an electricity service</a:t>
             </a:r>
           </a:p>
         </p:txBody>
@@ -17173,7 +17181,7 @@
         <p:spPr>
           <a:xfrm>
             <a:off x="297792" y="4592779"/>
-            <a:ext cx="7790081" cy="369332"/>
+            <a:ext cx="7891135" cy="369332"/>
           </a:xfrm>
           <a:prstGeom prst="rect">
             <a:avLst/>
@@ -17188,11 +17196,11 @@
           <a:p>
             <a:r>
               <a:rPr lang="en-US" dirty="0"/>
-              <a:t>Check out the </a:t>
+              <a:t>Check out the ‘</a:t>
             </a:r>
             <a:r>
               <a:rPr lang="en-US" b="1" dirty="0"/>
-              <a:t>how to </a:t>
+              <a:t>how to’ </a:t>
             </a:r>
             <a:r>
               <a:rPr lang="en-US" dirty="0"/>
